--- a/templates/blue-corporate.pptx
+++ b/templates/blue-corporate.pptx
@@ -898,7 +898,7 @@
       </p:pic>
       <p:sp>
         <p:nvSpPr>
-          <p:cNvPr id="2" name="Subtitle 1">
+          <p:cNvPr id="2" name="subtitle">
             <a:extLst>
               <a:ext uri="{FF2B5EF4-FFF2-40B4-BE49-F238E27FC236}">
                 <a16:creationId xmlns:a16="http://schemas.microsoft.com/office/drawing/2014/main" id="{9BAE121A-5259-1180-7385-CE2C03431052}"/>
@@ -943,7 +943,7 @@
       </p:sp>
       <p:sp>
         <p:nvSpPr>
-          <p:cNvPr id="11" name="Title 1">
+          <p:cNvPr id="11" name="title">
             <a:extLst>
               <a:ext uri="{FF2B5EF4-FFF2-40B4-BE49-F238E27FC236}">
                 <a16:creationId xmlns:a16="http://schemas.microsoft.com/office/drawing/2014/main" id="{B810682D-F26A-B1BF-CD97-BB8BD31B2F32}"/>
@@ -1197,7 +1197,7 @@
       </p:pic>
       <p:sp>
         <p:nvSpPr>
-          <p:cNvPr id="2" name="Title 1">
+          <p:cNvPr id="2" name="title">
             <a:extLst>
               <a:ext uri="{FF2B5EF4-FFF2-40B4-BE49-F238E27FC236}">
                 <a16:creationId xmlns:a16="http://schemas.microsoft.com/office/drawing/2014/main" id="{C07285C8-D51D-91BB-C356-908E67607044}"/>
@@ -1235,7 +1235,7 @@
       </p:sp>
       <p:sp>
         <p:nvSpPr>
-          <p:cNvPr id="14" name="Content Placeholder 12">
+          <p:cNvPr id="14" name="body">
             <a:extLst>
               <a:ext uri="{FF2B5EF4-FFF2-40B4-BE49-F238E27FC236}">
                 <a16:creationId xmlns:a16="http://schemas.microsoft.com/office/drawing/2014/main" id="{19B7E7AC-A0E6-BE9A-4728-8FE036CF3538}"/>
@@ -1631,7 +1631,7 @@
       </p:pic>
       <p:sp>
         <p:nvSpPr>
-          <p:cNvPr id="11" name="Title 1">
+          <p:cNvPr id="11" name="title">
             <a:extLst>
               <a:ext uri="{FF2B5EF4-FFF2-40B4-BE49-F238E27FC236}">
                 <a16:creationId xmlns:a16="http://schemas.microsoft.com/office/drawing/2014/main" id="{B810682D-F26A-B1BF-CD97-BB8BD31B2F32}"/>
@@ -1944,7 +1944,7 @@
       </p:pic>
       <p:sp>
         <p:nvSpPr>
-          <p:cNvPr id="13" name="Title 123">
+          <p:cNvPr id="13" name="title">
             <a:extLst>
               <a:ext uri="{FF2B5EF4-FFF2-40B4-BE49-F238E27FC236}">
                 <a16:creationId xmlns:a16="http://schemas.microsoft.com/office/drawing/2014/main" id="{0B9C7C4B-FC2C-5D51-5679-3D5ED85185DA}"/>
@@ -1990,7 +1990,7 @@
       </p:sp>
       <p:sp>
         <p:nvSpPr>
-          <p:cNvPr id="10" name="Subtitle 9">
+          <p:cNvPr id="10" name="subtitle">
             <a:extLst>
               <a:ext uri="{FF2B5EF4-FFF2-40B4-BE49-F238E27FC236}">
                 <a16:creationId xmlns:a16="http://schemas.microsoft.com/office/drawing/2014/main" id="{C79F5B69-7199-E3E6-5554-6CC2207D48E4}"/>
@@ -2070,7 +2070,7 @@
       </p:grpSpPr>
       <p:sp>
         <p:nvSpPr>
-          <p:cNvPr id="2" name="Title 1"/>
+          <p:cNvPr id="2" name="title"/>
           <p:cNvSpPr>
             <a:spLocks noGrp="1"/>
           </p:cNvSpPr>
@@ -2274,7 +2274,7 @@
       </p:grpSpPr>
       <p:sp>
         <p:nvSpPr>
-          <p:cNvPr id="2" name="Title 1"/>
+          <p:cNvPr id="2" name="title"/>
           <p:cNvSpPr>
             <a:spLocks noGrp="1"/>
           </p:cNvSpPr>
